--- a/slide/themes/src/15_central accent.pptx
+++ b/slide/themes/src/15_central accent.pptx
@@ -5437,12 +5437,12 @@
     <a:fontScheme name="Office Theme">
       <a:majorFont>
         <a:latin typeface="Arial"/>
-        <a:ea typeface="SimSun"/>
+        <a:ea typeface="Microsoft YaHei"/>
         <a:cs typeface="Arial"/>
       </a:majorFont>
       <a:minorFont>
         <a:latin typeface="Arial"/>
-        <a:ea typeface="SimSun"/>
+        <a:ea typeface="Microsoft YaHei"/>
         <a:cs typeface="Arial"/>
       </a:minorFont>
     </a:fontScheme>
@@ -5674,12 +5674,12 @@
     <a:fontScheme name="Arial">
       <a:majorFont>
         <a:latin typeface="Arial"/>
-        <a:ea typeface="Arial"/>
+        <a:ea typeface="Microsoft YaHei"/>
         <a:cs typeface="Arial"/>
       </a:majorFont>
       <a:minorFont>
         <a:latin typeface="Arial"/>
-        <a:ea typeface="Arial"/>
+        <a:ea typeface="Microsoft YaHei"/>
         <a:cs typeface="Arial"/>
       </a:minorFont>
     </a:fontScheme>

--- a/slide/themes/src/15_central accent.pptx
+++ b/slide/themes/src/15_central accent.pptx
@@ -536,10 +536,7 @@
             <a:pPr>
               <a:defRPr/>
             </a:pPr>
-            <a:endParaRPr lang="en-US">
-              <a:latin typeface="Arial"/>
-              <a:cs typeface="Arial"/>
-            </a:endParaRPr>
+            <a:endParaRPr lang="en-US"/>
           </a:p>
         </p:txBody>
       </p:sp>
